--- a/curso/pptx/S09.pptx
+++ b/curso/pptx/S09.pptx
@@ -7389,7 +7389,7 @@
                 </a:solidFill>
                 <a:latin typeface="Nunito Sans"/>
               </a:rPr>
-              <a:t>¿Es verdad?</a:t>
+              <a:t>它是真的吗？</a:t>
             </a:r>
             <a:r>
               <a:rPr sz="2800" b="0">
@@ -7398,7 +7398,7 @@
                 </a:solidFill>
                 <a:latin typeface="Nunito Sans"/>
               </a:rPr>
-              <a:t> ¿O, al menos, es creíble?</a:t>
+              <a:t> 或者，至少是可信的吗？</a:t>
             </a:r>
           </a:p>
           <a:p>
@@ -7432,7 +7432,7 @@
                 </a:solidFill>
                 <a:latin typeface="Nunito Sans"/>
               </a:rPr>
-              <a:t>¿Viene a cuento?</a:t>
+              <a:t>它切题吗？</a:t>
             </a:r>
             <a:r>
               <a:rPr sz="2800" b="0">
@@ -7441,7 +7441,7 @@
                 </a:solidFill>
                 <a:latin typeface="Nunito Sans"/>
               </a:rPr>
-              <a:t> Es decir: ¿tiene que ver con la conclusión?</a:t>
+              <a:t> 也就是说：它和结论有关系吗？</a:t>
             </a:r>
           </a:p>
           <a:p>
@@ -7475,7 +7475,7 @@
                 </a:solidFill>
                 <a:latin typeface="Nunito Sans"/>
               </a:rPr>
-              <a:t>¿Es suficiente?</a:t>
+              <a:t>它足够吗？</a:t>
             </a:r>
             <a:r>
               <a:rPr sz="2800" b="0">
@@ -7484,7 +7484,7 @@
                 </a:solidFill>
                 <a:latin typeface="Nunito Sans"/>
               </a:rPr>
-              <a:t> ¿Basta, o hace falta más?</a:t>
+              <a:t> 够了，还是需要更多？</a:t>
             </a:r>
           </a:p>
           <a:p>
@@ -7509,7 +7509,7 @@
                 </a:solidFill>
                 <a:latin typeface="Nunito Sans"/>
               </a:rPr>
-              <a:t>Una </a:t>
+              <a:t>一个</a:t>
             </a:r>
             <a:r>
               <a:rPr sz="2800" b="1">
@@ -7518,7 +7518,7 @@
                 </a:solidFill>
                 <a:latin typeface="Nunito Sans"/>
               </a:rPr>
-              <a:t>buena</a:t>
+              <a:t>好</a:t>
             </a:r>
             <a:r>
               <a:rPr sz="2800" b="0">
@@ -7527,7 +7527,7 @@
                 </a:solidFill>
                 <a:latin typeface="Nunito Sans"/>
               </a:rPr>
-              <a:t> razón pasa las tres</a:t>
+              <a:t>理由要通过这三关</a:t>
             </a:r>
           </a:p>
         </p:txBody>
@@ -7779,7 +7779,7 @@
                 </a:solidFill>
                 <a:latin typeface="Nunito Sans"/>
               </a:rPr>
-              <a:t>«Con cuatro horas de sueño tienes de sobra»</a:t>
+              <a:t>“每天睡四个小时就足够了”</a:t>
             </a:r>
           </a:p>
           <a:p>
@@ -7804,7 +7804,7 @@
                 </a:solidFill>
                 <a:latin typeface="Nunito Sans"/>
               </a:rPr>
-              <a:t>Falso: a tu edad se recomiendan entre 8 y 10 horas</a:t>
+              <a:t>假的：你这个年纪，建议睡 8 到 10 个小时</a:t>
             </a:r>
           </a:p>
         </p:txBody>
@@ -8056,7 +8056,7 @@
                 </a:solidFill>
                 <a:latin typeface="Nunito Sans"/>
               </a:rPr>
-              <a:t>«Youssef debe ser delegado porque es el más alto»</a:t>
+              <a:t>“优素福应该当班长，因为他个子最高”</a:t>
             </a:r>
           </a:p>
           <a:p>
@@ -8081,7 +8081,7 @@
                 </a:solidFill>
                 <a:latin typeface="Nunito Sans"/>
               </a:rPr>
-              <a:t>Puede ser verdad, pero la altura no importa para ser delegado</a:t>
+              <a:t>可能是真的，但个子高矮和当班长没关系</a:t>
             </a:r>
           </a:p>
         </p:txBody>
@@ -8333,7 +8333,7 @@
                 </a:solidFill>
                 <a:latin typeface="Nunito Sans"/>
               </a:rPr>
-              <a:t>«Los de esa clase son unos vagos: uno no trajo los deberes»</a:t>
+              <a:t>“那个班的人都是懒鬼：有一个人没交作业”</a:t>
             </a:r>
           </a:p>
           <a:p>
@@ -8358,7 +8358,7 @@
                 </a:solidFill>
                 <a:latin typeface="Nunito Sans"/>
               </a:rPr>
-              <a:t>Un alumno, un día: no basta para hablar de toda una clase</a:t>
+              <a:t>一个学生、一天的情况：不足以说明整个班</a:t>
             </a:r>
           </a:p>
         </p:txBody>

--- a/curso/pptx/S09.pptx
+++ b/curso/pptx/S09.pptx
@@ -4888,7 +4888,7 @@
                 </a:solidFill>
                 <a:latin typeface="Nunito Sans"/>
               </a:rPr>
-              <a:t>“伊克尔应该当我们的守门员：他是班上个子最高的。”</a:t>
+              <a:t>“一个男孩应该当我们的守门员：他是班上个子最高的。”</a:t>
             </a:r>
           </a:p>
         </p:txBody>
@@ -4936,7 +4936,7 @@
                 </a:solidFill>
                 <a:latin typeface="Nunito Sans"/>
               </a:rPr>
-              <a:t>和优素福当班长一样：个子高不切题，对吧？</a:t>
+              <a:t>和当班长的例子一样：个子高不切题，对吧？</a:t>
             </a:r>
           </a:p>
           <a:p>
@@ -4961,7 +4961,7 @@
                 </a:solidFill>
                 <a:latin typeface="Nunito Sans"/>
               </a:rPr>
-              <a:t>看起来和优素福的例子一样：又是个子高。</a:t>
+              <a:t>看起来和当班长的那个例子一样：又是个子高。</a:t>
             </a:r>
           </a:p>
           <a:p>
@@ -8056,7 +8056,7 @@
                 </a:solidFill>
                 <a:latin typeface="Nunito Sans"/>
               </a:rPr>
-              <a:t>“优素福应该当班长，因为他个子最高”</a:t>
+              <a:t>“一个男孩应该当班长，因为他个子最高”</a:t>
             </a:r>
           </a:p>
           <a:p>
